--- a/submission/ppt/SmartGarbage_Presentation.pptx
+++ b/submission/ppt/SmartGarbage_Presentation.pptx
@@ -11673,7 +11673,7 @@
                 </a:solidFill>
                 <a:latin typeface="Calibri"/>
               </a:rPr>
-              <a:t>-  Swachh Bharat Mission (Grameen) Phase-II guidelines, Ministry of Jal Shakti.</a:t>
+              <a:t>[1]  Swachh Bharat Mission (Grameen) Phase-II guidelines, Ministry of Jal Shakti.</a:t>
             </a:r>
           </a:p>
         </p:txBody>
@@ -11715,7 +11715,7 @@
                 </a:solidFill>
                 <a:latin typeface="Calibri"/>
               </a:rPr>
-              <a:t>-  Web &amp; Backend Architecture</a:t>
+              <a:t>[2]  Web &amp; Backend Architecture</a:t>
             </a:r>
           </a:p>
         </p:txBody>
@@ -11757,7 +11757,7 @@
                 </a:solidFill>
                 <a:latin typeface="Calibri"/>
               </a:rPr>
-              <a:t>-  Flask 3.x documentation (Pallets Projects) - application factory, blueprints.</a:t>
+              <a:t>[3]  Flask 3.x documentation (Pallets Projects) - application factory, blueprints.</a:t>
             </a:r>
           </a:p>
         </p:txBody>
@@ -11799,7 +11799,7 @@
                 </a:solidFill>
                 <a:latin typeface="Calibri"/>
               </a:rPr>
-              <a:t>-  SQLAlchemy 2.0 documentation; Alembic migration framework.</a:t>
+              <a:t>[4]  SQLAlchemy 2.0 documentation; Alembic migration framework.</a:t>
             </a:r>
           </a:p>
         </p:txBody>
@@ -11841,7 +11841,7 @@
                 </a:solidFill>
                 <a:latin typeface="Calibri"/>
               </a:rPr>
-              <a:t>-  Machine Learning &amp; Predictive Modeling</a:t>
+              <a:t>[5]  Machine Learning &amp; Predictive Modeling</a:t>
             </a:r>
           </a:p>
         </p:txBody>
@@ -11883,7 +11883,7 @@
                 </a:solidFill>
                 <a:latin typeface="Calibri"/>
               </a:rPr>
-              <a:t>-  Liu, Ting &amp; Zhou (2008), Isolation Forest, AAAI - the anomaly model actually deployed.</a:t>
+              <a:t>[6]  Liu, Ting &amp; Zhou (2008), Isolation Forest, AAAI - the anomaly model actually deployed.</a:t>
             </a:r>
           </a:p>
         </p:txBody>
@@ -11925,7 +11925,7 @@
                 </a:solidFill>
                 <a:latin typeface="Calibri"/>
               </a:rPr>
-              <a:t>-  scikit-learn - HistGradientBoostingRegressor (overflow ETA) &amp; IsolationForest (anomaly detection), as used in app/ml_model.py.</a:t>
+              <a:t>[7]  scikit-learn - HistGradientBoostingRegressor (overflow ETA) &amp; IsolationForest (anomaly detection), as used in app/ml_model.py.</a:t>
             </a:r>
           </a:p>
         </p:txBody>
@@ -11967,7 +11967,7 @@
                 </a:solidFill>
                 <a:latin typeface="Calibri"/>
               </a:rPr>
-              <a:t>-  Anagnostopoulos et al. (2015), Waste Management 45, 34-41 - IoT bin monitoring.</a:t>
+              <a:t>[8]  Anagnostopoulos et al. (2015), Waste Management 45, 34-41 - IoT bin monitoring.</a:t>
             </a:r>
           </a:p>
         </p:txBody>
@@ -12009,7 +12009,7 @@
                 </a:solidFill>
                 <a:latin typeface="Calibri"/>
               </a:rPr>
-              <a:t>-  Chen et al. (2020) - ensemble learning for short-term waste prediction.</a:t>
+              <a:t>[9]  Chen et al. (2020) - ensemble learning for short-term waste prediction.</a:t>
             </a:r>
           </a:p>
         </p:txBody>
@@ -12051,7 +12051,7 @@
                 </a:solidFill>
                 <a:latin typeface="Calibri"/>
               </a:rPr>
-              <a:t>-  Accessibility &amp; Security</a:t>
+              <a:t>[10]  Accessibility &amp; Security</a:t>
             </a:r>
           </a:p>
         </p:txBody>
@@ -12093,7 +12093,7 @@
                 </a:solidFill>
                 <a:latin typeface="Calibri"/>
               </a:rPr>
-              <a:t>-  WCAG 2.1 Level AA (W3C); OWASP Top 10 and secure-headers project.</a:t>
+              <a:t>[11]  WCAG 2.1 Level AA (W3C); OWASP Top 10 and secure-headers project.</a:t>
             </a:r>
           </a:p>
         </p:txBody>
